--- a/ICT80004-Internship_Project/Mid_Internship_Project_Review/Mid_Internship_Project_Review_104837257.pptx
+++ b/ICT80004-Internship_Project/Mid_Internship_Project_Review/Mid_Internship_Project_Review_104837257.pptx
@@ -332,45 +332,6 @@
     </pc:docChg>
   </pc:docChgLst>
   <pc:docChgLst>
-    <pc:chgData name="VIKAS KADRUVAN" userId="S::104981442@student.swin.edu.au::92ef7554-5bcf-4e19-a1da-a434651e7d09" providerId="AD" clId="Web-{158CC6B5-BE2F-4EA6-B105-F1A4027AA5B7}"/>
-    <pc:docChg chg="modSld">
-      <pc:chgData name="VIKAS KADRUVAN" userId="S::104981442@student.swin.edu.au::92ef7554-5bcf-4e19-a1da-a434651e7d09" providerId="AD" clId="Web-{158CC6B5-BE2F-4EA6-B105-F1A4027AA5B7}" dt="2025-08-29T02:01:28.532" v="45" actId="20577"/>
-      <pc:docMkLst>
-        <pc:docMk/>
-      </pc:docMkLst>
-      <pc:sldChg chg="modSp">
-        <pc:chgData name="VIKAS KADRUVAN" userId="S::104981442@student.swin.edu.au::92ef7554-5bcf-4e19-a1da-a434651e7d09" providerId="AD" clId="Web-{158CC6B5-BE2F-4EA6-B105-F1A4027AA5B7}" dt="2025-08-29T00:52:42.719" v="12" actId="20577"/>
-        <pc:sldMkLst>
-          <pc:docMk/>
-          <pc:sldMk cId="1877701230" sldId="544"/>
-        </pc:sldMkLst>
-        <pc:spChg chg="mod">
-          <ac:chgData name="VIKAS KADRUVAN" userId="S::104981442@student.swin.edu.au::92ef7554-5bcf-4e19-a1da-a434651e7d09" providerId="AD" clId="Web-{158CC6B5-BE2F-4EA6-B105-F1A4027AA5B7}" dt="2025-08-29T00:52:42.719" v="12" actId="20577"/>
-          <ac:spMkLst>
-            <pc:docMk/>
-            <pc:sldMk cId="1877701230" sldId="544"/>
-            <ac:spMk id="3" creationId="{55519D01-29BE-BE76-41C5-9D58AD8119DC}"/>
-          </ac:spMkLst>
-        </pc:spChg>
-      </pc:sldChg>
-      <pc:sldChg chg="modSp">
-        <pc:chgData name="VIKAS KADRUVAN" userId="S::104981442@student.swin.edu.au::92ef7554-5bcf-4e19-a1da-a434651e7d09" providerId="AD" clId="Web-{158CC6B5-BE2F-4EA6-B105-F1A4027AA5B7}" dt="2025-08-29T02:01:28.532" v="45" actId="20577"/>
-        <pc:sldMkLst>
-          <pc:docMk/>
-          <pc:sldMk cId="3445660626" sldId="554"/>
-        </pc:sldMkLst>
-        <pc:spChg chg="mod">
-          <ac:chgData name="VIKAS KADRUVAN" userId="S::104981442@student.swin.edu.au::92ef7554-5bcf-4e19-a1da-a434651e7d09" providerId="AD" clId="Web-{158CC6B5-BE2F-4EA6-B105-F1A4027AA5B7}" dt="2025-08-29T02:01:28.532" v="45" actId="20577"/>
-          <ac:spMkLst>
-            <pc:docMk/>
-            <pc:sldMk cId="3445660626" sldId="554"/>
-            <ac:spMk id="5" creationId="{0A6D1D2B-3643-092C-40A1-EB1B722D59B9}"/>
-          </ac:spMkLst>
-        </pc:spChg>
-      </pc:sldChg>
-    </pc:docChg>
-  </pc:docChgLst>
-  <pc:docChgLst>
     <pc:chgData name="VAISAKH PARIYACHERI" userId="S::104800822@student.swin.edu.au::a8f5e61c-a011-4383-97ee-d44e63621b2d" providerId="AD" clId="Web-{9EE9AD1F-119E-BF1A-7D2C-552D05718645}"/>
     <pc:docChg chg="addSld delSld modSld">
       <pc:chgData name="VAISAKH PARIYACHERI" userId="S::104800822@student.swin.edu.au::a8f5e61c-a011-4383-97ee-d44e63621b2d" providerId="AD" clId="Web-{9EE9AD1F-119E-BF1A-7D2C-552D05718645}" dt="2025-08-29T02:30:38.255" v="180" actId="1076"/>
@@ -674,6 +635,45 @@
             <ac:cxnSpMk id="15" creationId="{9B56ABD1-9A34-6C0C-F2FA-E09F051C6241}"/>
           </ac:cxnSpMkLst>
         </pc:cxnChg>
+      </pc:sldChg>
+    </pc:docChg>
+  </pc:docChgLst>
+  <pc:docChgLst>
+    <pc:chgData name="VIKAS KADRUVAN" userId="S::104981442@student.swin.edu.au::92ef7554-5bcf-4e19-a1da-a434651e7d09" providerId="AD" clId="Web-{158CC6B5-BE2F-4EA6-B105-F1A4027AA5B7}"/>
+    <pc:docChg chg="modSld">
+      <pc:chgData name="VIKAS KADRUVAN" userId="S::104981442@student.swin.edu.au::92ef7554-5bcf-4e19-a1da-a434651e7d09" providerId="AD" clId="Web-{158CC6B5-BE2F-4EA6-B105-F1A4027AA5B7}" dt="2025-08-29T02:01:28.532" v="45" actId="20577"/>
+      <pc:docMkLst>
+        <pc:docMk/>
+      </pc:docMkLst>
+      <pc:sldChg chg="modSp">
+        <pc:chgData name="VIKAS KADRUVAN" userId="S::104981442@student.swin.edu.au::92ef7554-5bcf-4e19-a1da-a434651e7d09" providerId="AD" clId="Web-{158CC6B5-BE2F-4EA6-B105-F1A4027AA5B7}" dt="2025-08-29T00:52:42.719" v="12" actId="20577"/>
+        <pc:sldMkLst>
+          <pc:docMk/>
+          <pc:sldMk cId="1877701230" sldId="544"/>
+        </pc:sldMkLst>
+        <pc:spChg chg="mod">
+          <ac:chgData name="VIKAS KADRUVAN" userId="S::104981442@student.swin.edu.au::92ef7554-5bcf-4e19-a1da-a434651e7d09" providerId="AD" clId="Web-{158CC6B5-BE2F-4EA6-B105-F1A4027AA5B7}" dt="2025-08-29T00:52:42.719" v="12" actId="20577"/>
+          <ac:spMkLst>
+            <pc:docMk/>
+            <pc:sldMk cId="1877701230" sldId="544"/>
+            <ac:spMk id="3" creationId="{55519D01-29BE-BE76-41C5-9D58AD8119DC}"/>
+          </ac:spMkLst>
+        </pc:spChg>
+      </pc:sldChg>
+      <pc:sldChg chg="modSp">
+        <pc:chgData name="VIKAS KADRUVAN" userId="S::104981442@student.swin.edu.au::92ef7554-5bcf-4e19-a1da-a434651e7d09" providerId="AD" clId="Web-{158CC6B5-BE2F-4EA6-B105-F1A4027AA5B7}" dt="2025-08-29T02:01:28.532" v="45" actId="20577"/>
+        <pc:sldMkLst>
+          <pc:docMk/>
+          <pc:sldMk cId="3445660626" sldId="554"/>
+        </pc:sldMkLst>
+        <pc:spChg chg="mod">
+          <ac:chgData name="VIKAS KADRUVAN" userId="S::104981442@student.swin.edu.au::92ef7554-5bcf-4e19-a1da-a434651e7d09" providerId="AD" clId="Web-{158CC6B5-BE2F-4EA6-B105-F1A4027AA5B7}" dt="2025-08-29T02:01:28.532" v="45" actId="20577"/>
+          <ac:spMkLst>
+            <pc:docMk/>
+            <pc:sldMk cId="3445660626" sldId="554"/>
+            <ac:spMk id="5" creationId="{0A6D1D2B-3643-092C-40A1-EB1B722D59B9}"/>
+          </ac:spMkLst>
+        </pc:spChg>
       </pc:sldChg>
     </pc:docChg>
   </pc:docChgLst>
@@ -1106,7 +1106,7 @@
           <a:p>
             <a:fld id="{3F00BCFC-AFFD-334C-A183-6116BAFDF92B}" type="datetimeFigureOut">
               <a:rPr lang="en-US" smtClean="0"/>
-              <a:t>9/12/2025</a:t>
+              <a:t>10/19/2025</a:t>
             </a:fld>
             <a:endParaRPr lang="en-US"/>
           </a:p>
@@ -22227,34 +22227,6 @@
               <a:t>22</a:t>
             </a:fld>
             <a:endParaRPr lang="en-US"/>
-          </a:p>
-        </p:txBody>
-      </p:sp>
-      <p:sp>
-        <p:nvSpPr>
-          <p:cNvPr id="3" name="Footer Placeholder 2">
-            <a:extLst>
-              <a:ext uri="{FF2B5EF4-FFF2-40B4-BE49-F238E27FC236}">
-                <a16:creationId xmlns:a16="http://schemas.microsoft.com/office/drawing/2014/main" id="{CF56FA64-1DCA-ECF3-8774-AE61D0C9EFD9}"/>
-              </a:ext>
-            </a:extLst>
-          </p:cNvPr>
-          <p:cNvSpPr>
-            <a:spLocks noGrp="1"/>
-          </p:cNvSpPr>
-          <p:nvPr>
-            <p:ph type="ftr" sz="quarter" idx="10"/>
-          </p:nvPr>
-        </p:nvSpPr>
-        <p:spPr/>
-        <p:txBody>
-          <a:bodyPr/>
-          <a:lstStyle/>
-          <a:p>
-            <a:r>
-              <a:rPr lang="en-US"/>
-              <a:t>Crypto: investing &amp; trading</a:t>
-            </a:r>
           </a:p>
         </p:txBody>
       </p:sp>
@@ -25081,6 +25053,26 @@
 </file>
 
 <file path=customXml/item2.xml><?xml version="1.0" encoding="utf-8"?>
+<p:properties xmlns:p="http://schemas.microsoft.com/office/2006/metadata/properties" xmlns:xsi="http://www.w3.org/2001/XMLSchema-instance" xmlns:pc="http://schemas.microsoft.com/office/infopath/2007/PartnerControls">
+  <documentManagement>
+    <_ip_UnifiedCompliancePolicyUIAction xmlns="http://schemas.microsoft.com/sharepoint/v3" xsi:nil="true"/>
+    <Image xmlns="71af3243-3dd4-4a8d-8c0d-dd76da1f02a5">
+      <Url xsi:nil="true"/>
+      <Description xsi:nil="true"/>
+    </Image>
+    <Status xmlns="71af3243-3dd4-4a8d-8c0d-dd76da1f02a5">Not started</Status>
+    <Background xmlns="71af3243-3dd4-4a8d-8c0d-dd76da1f02a5">false</Background>
+    <_ip_UnifiedCompliancePolicyProperties xmlns="http://schemas.microsoft.com/sharepoint/v3" xsi:nil="true"/>
+    <ImageTagsTaxHTField xmlns="71af3243-3dd4-4a8d-8c0d-dd76da1f02a5">
+      <Terms xmlns="http://schemas.microsoft.com/office/infopath/2007/PartnerControls"/>
+    </ImageTagsTaxHTField>
+    <TaxCatchAll xmlns="230e9df3-be65-4c73-a93b-d1236ebd677e" xsi:nil="true"/>
+    <MediaServiceKeyPoints xmlns="71af3243-3dd4-4a8d-8c0d-dd76da1f02a5" xsi:nil="true"/>
+  </documentManagement>
+</p:properties>
+</file>
+
+<file path=customXml/item3.xml><?xml version="1.0" encoding="utf-8"?>
 <ct:contentTypeSchema xmlns:ct="http://schemas.microsoft.com/office/2006/metadata/contentType" xmlns:ma="http://schemas.microsoft.com/office/2006/metadata/properties/metaAttributes" ct:_="" ma:_="" ma:contentTypeName="Document" ma:contentTypeID="0x01010079F111ED35F8CC479449609E8A0923A6" ma:contentTypeVersion="25" ma:contentTypeDescription="Create a new document." ma:contentTypeScope="" ma:versionID="e02306daf00165b375dc6a58966960be">
   <xsd:schema xmlns:xsd="http://www.w3.org/2001/XMLSchema" xmlns:xs="http://www.w3.org/2001/XMLSchema" xmlns:p="http://schemas.microsoft.com/office/2006/metadata/properties" xmlns:ns1="http://schemas.microsoft.com/sharepoint/v3" xmlns:ns2="71af3243-3dd4-4a8d-8c0d-dd76da1f02a5" xmlns:ns3="16c05727-aa75-4e4a-9b5f-8a80a1165891" xmlns:ns4="230e9df3-be65-4c73-a93b-d1236ebd677e" targetNamespace="http://schemas.microsoft.com/office/2006/metadata/properties" ma:root="true" ma:fieldsID="df88fb76bf5f555224557953949c1ec9" ns1:_="" ns2:_="" ns3:_="" ns4:_="">
     <xsd:import namespace="http://schemas.microsoft.com/sharepoint/v3"/>
@@ -25374,26 +25366,6 @@
 </ct:contentTypeSchema>
 </file>
 
-<file path=customXml/item3.xml><?xml version="1.0" encoding="utf-8"?>
-<p:properties xmlns:p="http://schemas.microsoft.com/office/2006/metadata/properties" xmlns:xsi="http://www.w3.org/2001/XMLSchema-instance" xmlns:pc="http://schemas.microsoft.com/office/infopath/2007/PartnerControls">
-  <documentManagement>
-    <_ip_UnifiedCompliancePolicyUIAction xmlns="http://schemas.microsoft.com/sharepoint/v3" xsi:nil="true"/>
-    <Image xmlns="71af3243-3dd4-4a8d-8c0d-dd76da1f02a5">
-      <Url xsi:nil="true"/>
-      <Description xsi:nil="true"/>
-    </Image>
-    <Status xmlns="71af3243-3dd4-4a8d-8c0d-dd76da1f02a5">Not started</Status>
-    <Background xmlns="71af3243-3dd4-4a8d-8c0d-dd76da1f02a5">false</Background>
-    <_ip_UnifiedCompliancePolicyProperties xmlns="http://schemas.microsoft.com/sharepoint/v3" xsi:nil="true"/>
-    <ImageTagsTaxHTField xmlns="71af3243-3dd4-4a8d-8c0d-dd76da1f02a5">
-      <Terms xmlns="http://schemas.microsoft.com/office/infopath/2007/PartnerControls"/>
-    </ImageTagsTaxHTField>
-    <TaxCatchAll xmlns="230e9df3-be65-4c73-a93b-d1236ebd677e" xsi:nil="true"/>
-    <MediaServiceKeyPoints xmlns="71af3243-3dd4-4a8d-8c0d-dd76da1f02a5" xsi:nil="true"/>
-  </documentManagement>
-</p:properties>
-</file>
-
 <file path=customXml/itemProps1.xml><?xml version="1.0" encoding="utf-8"?>
 <ds:datastoreItem xmlns:ds="http://schemas.openxmlformats.org/officeDocument/2006/customXml" ds:itemID="{43C4A95C-9007-4EA6-944B-306B6F2A0100}">
   <ds:schemaRefs>
@@ -25403,6 +25375,18 @@
 </file>
 
 <file path=customXml/itemProps2.xml><?xml version="1.0" encoding="utf-8"?>
+<ds:datastoreItem xmlns:ds="http://schemas.openxmlformats.org/officeDocument/2006/customXml" ds:itemID="{EA4A3FD6-E6BF-490E-B6B4-6A011394B0EB}">
+  <ds:schemaRefs>
+    <ds:schemaRef ds:uri="230e9df3-be65-4c73-a93b-d1236ebd677e"/>
+    <ds:schemaRef ds:uri="71af3243-3dd4-4a8d-8c0d-dd76da1f02a5"/>
+    <ds:schemaRef ds:uri="http://schemas.microsoft.com/office/2006/metadata/properties"/>
+    <ds:schemaRef ds:uri="http://schemas.microsoft.com/office/infopath/2007/PartnerControls"/>
+    <ds:schemaRef ds:uri="http://schemas.microsoft.com/sharepoint/v3"/>
+  </ds:schemaRefs>
+</ds:datastoreItem>
+</file>
+
+<file path=customXml/itemProps3.xml><?xml version="1.0" encoding="utf-8"?>
 <ds:datastoreItem xmlns:ds="http://schemas.openxmlformats.org/officeDocument/2006/customXml" ds:itemID="{62CF8670-35D1-4455-AC7A-762B7388BE22}">
   <ds:schemaRefs>
     <ds:schemaRef ds:uri="16c05727-aa75-4e4a-9b5f-8a80a1165891"/>
@@ -25423,18 +25407,6 @@
 </ds:datastoreItem>
 </file>
 
-<file path=customXml/itemProps3.xml><?xml version="1.0" encoding="utf-8"?>
-<ds:datastoreItem xmlns:ds="http://schemas.openxmlformats.org/officeDocument/2006/customXml" ds:itemID="{EA4A3FD6-E6BF-490E-B6B4-6A011394B0EB}">
-  <ds:schemaRefs>
-    <ds:schemaRef ds:uri="230e9df3-be65-4c73-a93b-d1236ebd677e"/>
-    <ds:schemaRef ds:uri="71af3243-3dd4-4a8d-8c0d-dd76da1f02a5"/>
-    <ds:schemaRef ds:uri="http://schemas.microsoft.com/office/2006/metadata/properties"/>
-    <ds:schemaRef ds:uri="http://schemas.microsoft.com/office/infopath/2007/PartnerControls"/>
-    <ds:schemaRef ds:uri="http://schemas.microsoft.com/sharepoint/v3"/>
-  </ds:schemaRefs>
-</ds:datastoreItem>
-</file>
-
 <file path=docMetadata/LabelInfo.xml><?xml version="1.0" encoding="utf-8"?>
 <clbl:labelList xmlns:clbl="http://schemas.microsoft.com/office/2020/mipLabelMetadata"/>
 </file>